--- a/Store Support/Projects/VET_Dashboard/reports/Dallas_Team_Report_WK13.pptx
+++ b/Store Support/Projects/VET_Dashboard/reports/Dallas_Team_Report_WK13.pptx
@@ -3362,7 +3362,7 @@
         <p:spPr>
           <a:xfrm>
             <a:off x="0" y="0"/>
-            <a:ext cx="8778240" cy="5316333"/>
+            <a:ext cx="8778240" cy="6583680"/>
           </a:xfrm>
           <a:prstGeom prst="rect">
             <a:avLst/>
@@ -3572,7 +3572,7 @@
         <p:spPr>
           <a:xfrm>
             <a:off x="0" y="0"/>
-            <a:ext cx="8778240" cy="4566175"/>
+            <a:ext cx="8778240" cy="4379801"/>
           </a:xfrm>
           <a:prstGeom prst="rect">
             <a:avLst/>
@@ -3614,7 +3614,7 @@
         <p:spPr>
           <a:xfrm>
             <a:off x="0" y="0"/>
-            <a:ext cx="8778240" cy="5675104"/>
+            <a:ext cx="8778240" cy="4174789"/>
           </a:xfrm>
           <a:prstGeom prst="rect">
             <a:avLst/>

--- a/Store Support/Projects/VET_Dashboard/reports/Dallas_Team_Report_WK13.pptx
+++ b/Store Support/Projects/VET_Dashboard/reports/Dallas_Team_Report_WK13.pptx
@@ -3614,7 +3614,7 @@
         <p:spPr>
           <a:xfrm>
             <a:off x="0" y="0"/>
-            <a:ext cx="8778240" cy="4174789"/>
+            <a:ext cx="8778240" cy="5153255"/>
           </a:xfrm>
           <a:prstGeom prst="rect">
             <a:avLst/>
